--- a/dist/초2/국어/기초문해/초2_국어_기초문해_04_낱말의관계.pptx
+++ b/dist/초2/국어/기초문해/초2_국어_기초문해_04_낱말의관계.pptx
@@ -119,39 +119,39 @@
   <p:extLst>
     <p:ext uri="{521415D9-36F7-43E2-AB2F-B90AF26B5E84}">
       <p14:sectionLst xmlns:p14="http://schemas.microsoft.com/office/powerpoint/2010/main">
-        <p14:section name="도입" id="{6cd33d8d-0143-f078-ad23-97df359b6838}">
+        <p14:section name="도입" id="{b2d3afc2-3bf4-05cc-a956-cc5c064891c0}">
           <p14:sldIdLst>
             <p14:sldId id="256"/>
             <p14:sldId id="257"/>
           </p14:sldIdLst>
         </p14:section>
-        <p14:section name="개념" id="{1a7ef934-33a8-de19-7d7a-93e2f435bffe}">
+        <p14:section name="개념" id="{ff35a75c-b1ae-d322-0148-89953da42224}">
           <p14:sldIdLst>
             <p14:sldId id="258"/>
             <p14:sldId id="259"/>
             <p14:sldId id="260"/>
           </p14:sldIdLst>
         </p14:section>
-        <p14:section name="연습" id="{6a264b6e-1ff1-6983-67f4-2c839455fe69}">
+        <p14:section name="연습" id="{d131a99e-af7d-a703-884f-0b89b3dad018}">
           <p14:sldIdLst>
             <p14:sldId id="261"/>
             <p14:sldId id="262"/>
             <p14:sldId id="263"/>
           </p14:sldIdLst>
         </p14:section>
-        <p14:section name="확인" id="{c9dc6812-2e3a-dc4d-f7f3-47e3f0a41329}">
+        <p14:section name="확인" id="{3c16d87f-1114-1dcb-1bdf-9571856a36f4}">
           <p14:sldIdLst>
             <p14:sldId id="264"/>
             <p14:sldId id="265"/>
             <p14:sldId id="266"/>
           </p14:sldIdLst>
         </p14:section>
-        <p14:section name="정리" id="{aeec0c3b-0757-a17d-d6b1-d538d5d7563e}">
+        <p14:section name="정리" id="{7174e1bf-1e55-3593-1187-9cf8c791bbc3}">
           <p14:sldIdLst>
             <p14:sldId id="267"/>
           </p14:sldIdLst>
         </p14:section>
-        <p14:section name="보충" id="{08e1f718-02fc-ba40-fae1-2b36d9e4e06d}">
+        <p14:section name="보충" id="{675c2a18-bd8c-9232-9dbf-b74dd142e70c}">
           <p14:sldIdLst>
             <p14:sldId id="268"/>
           </p14:sldIdLst>
@@ -568,6 +568,8 @@
 - “오늘은 뜻이 비슷한 말, 반대인 말, 소리나 모양을 흉내 내는 말을 배울 거야.”
 예상 답
 - “작다요.” “커다랗다요.”
+막히면
+- 큰 컵과 작은 컵을 보여 주며 “이 컵은 커. 저 컵은?”이라고 묻습니다.
 주의
 - ‘작다’(반대말)와 ‘커다랗다’(비슷한 말) 모두 좋은 답입니다. 어떤 짝인지는 S03, S04에서 다룹니다.</a:t>
             </a:r>
@@ -863,7 +865,9 @@
 예상 답
 - “비슷한 말, 반대말, 흉내 내는 말이요.”
 정답
-- ① 길다 ② 얼른 ③ 멍멍(왈왈도 맞음)</a:t>
+- ① 길다 ② 얼른 ③ 멍멍(왈왈도 맞음)
+막히면
+- S03, S04, S05의 카드를 다시 보여 줍니다.</a:t>
             </a:r>
             <a:endParaRPr lang="en-US" dirty="0"/>
           </a:p>
@@ -1257,7 +1261,7 @@
 막히면
 - 실물로 보여 줍니다. 큰 컵·작은 컵, 바둑돌 많이·적게, 손을 높이·낮게.
 주의
-- ‘높다 ↔ 낮다’의 ‘낮다’는 지난 시간에 배운 낱말입니다(낫다·낮다·낳다).</a:t>
+- ‘낮다’는 앞 차시 ‘헷갈리는 낱말 바르게 쓰기’에서 배운 낱말입니다(낫다·낮다·낳다).</a:t>
             </a:r>
             <a:endParaRPr lang="en-US" dirty="0"/>
           </a:p>

--- a/dist/초2/국어/기초문해/초2_국어_기초문해_04_낱말의관계.pptx
+++ b/dist/초2/국어/기초문해/초2_국어_기초문해_04_낱말의관계.pptx
@@ -119,39 +119,39 @@
   <p:extLst>
     <p:ext uri="{521415D9-36F7-43E2-AB2F-B90AF26B5E84}">
       <p14:sectionLst xmlns:p14="http://schemas.microsoft.com/office/powerpoint/2010/main">
-        <p14:section name="도입" id="{b2d3afc2-3bf4-05cc-a956-cc5c064891c0}">
+        <p14:section name="도입" id="{8e8c1521-83c7-fb2d-bf34-0696e5411ad5}">
           <p14:sldIdLst>
             <p14:sldId id="256"/>
             <p14:sldId id="257"/>
           </p14:sldIdLst>
         </p14:section>
-        <p14:section name="개념" id="{ff35a75c-b1ae-d322-0148-89953da42224}">
+        <p14:section name="개념" id="{d960f5fa-fd34-5445-1112-8ca1d5859514}">
           <p14:sldIdLst>
             <p14:sldId id="258"/>
             <p14:sldId id="259"/>
             <p14:sldId id="260"/>
           </p14:sldIdLst>
         </p14:section>
-        <p14:section name="연습" id="{d131a99e-af7d-a703-884f-0b89b3dad018}">
+        <p14:section name="연습" id="{ed30f12f-6660-b10f-18c7-5db526782059}">
           <p14:sldIdLst>
             <p14:sldId id="261"/>
             <p14:sldId id="262"/>
             <p14:sldId id="263"/>
           </p14:sldIdLst>
         </p14:section>
-        <p14:section name="확인" id="{3c16d87f-1114-1dcb-1bdf-9571856a36f4}">
+        <p14:section name="확인" id="{1bf822f9-d6dd-39ad-a5b2-7d142d2cf953}">
           <p14:sldIdLst>
             <p14:sldId id="264"/>
             <p14:sldId id="265"/>
             <p14:sldId id="266"/>
           </p14:sldIdLst>
         </p14:section>
-        <p14:section name="정리" id="{7174e1bf-1e55-3593-1187-9cf8c791bbc3}">
+        <p14:section name="정리" id="{8ae538e1-810b-704b-2e99-82c77fff8bfc}">
           <p14:sldIdLst>
             <p14:sldId id="267"/>
           </p14:sldIdLst>
         </p14:section>
-        <p14:section name="보충" id="{675c2a18-bd8c-9232-9dbf-b74dd142e70c}">
+        <p14:section name="보충" id="{f2adc2d4-e107-61b6-0112-45f9ac114753}">
           <p14:sldIdLst>
             <p14:sldId id="268"/>
           </p14:sldIdLst>
